--- a/docs/sample-proposal/Aerivio_Commercialization.pptx
+++ b/docs/sample-proposal/Aerivio_Commercialization.pptx
@@ -1341,6 +1341,45 @@
           </a:p>
         </p:txBody>
       </p:sp>
+      <p:sp>
+        <p:nvSpPr>
+          <p:cNvPr id="5" name="Text 3"/>
+          <p:cNvSpPr/>
+          <p:nvPr/>
+        </p:nvSpPr>
+        <p:spPr>
+          <a:xfrm>
+            <a:off x="457200" y="2286000"/>
+            <a:ext cx="11274552" cy="365760"/>
+          </a:xfrm>
+          <a:prstGeom prst="rect">
+            <a:avLst/>
+          </a:prstGeom>
+          <a:noFill/>
+          <a:ln/>
+        </p:spPr>
+        <p:txBody>
+          <a:bodyPr wrap="square" rtlCol="0" anchor="t"/>
+          <a:lstStyle/>
+          <a:p>
+            <a:pPr indent="0" marL="0">
+              <a:buNone/>
+            </a:pPr>
+            <a:r>
+              <a:rPr lang="en-US" sz="1800" dirty="0">
+                <a:solidFill>
+                  <a:srgbClr val="444444"/>
+                </a:solidFill>
+                <a:latin typeface="Arial" pitchFamily="34" charset="0"/>
+                <a:ea typeface="Arial" pitchFamily="34" charset="-122"/>
+                <a:cs typeface="Arial" pitchFamily="34" charset="-120"/>
+              </a:rPr>
+              <a:t>Topic N251-042 · US Navy · $150,000 / 6 months</a:t>
+            </a:r>
+            <a:endParaRPr lang="en-US" sz="1800" dirty="0"/>
+          </a:p>
+        </p:txBody>
+      </p:sp>
     </p:spTree>
   </p:cSld>
   <p:clrMapOvr>
@@ -1414,7 +1453,7 @@
         <p:spPr>
           <a:xfrm>
             <a:off x="457200" y="1371600"/>
-            <a:ext cx="11274552" cy="960120"/>
+            <a:ext cx="11274552" cy="1280160"/>
           </a:xfrm>
           <a:prstGeom prst="rect">
             <a:avLst/>
@@ -1439,7 +1478,7 @@
                 <a:ea typeface="Arial" pitchFamily="34" charset="-122"/>
                 <a:cs typeface="Arial" pitchFamily="34" charset="-120"/>
               </a:rPr>
-              <a:t>Navy USV fleet projected to exceed 300 hulls by 2030</a:t>
+              <a:t>Navy USV fleet projected to exceed 300 hulls by 2030 — each needs edge acoustic sensing</a:t>
             </a:r>
             <a:endParaRPr lang="en-US" sz="1800" dirty="0"/>
           </a:p>
@@ -1457,7 +1496,7 @@
                 <a:ea typeface="Arial" pitchFamily="34" charset="-122"/>
                 <a:cs typeface="Arial" pitchFamily="34" charset="-120"/>
               </a:rPr>
-              <a:t>Every autonomous hull needs edge acoustic sensing</a:t>
+              <a:t>Beachhead: US Navy programs of record</a:t>
             </a:r>
             <a:endParaRPr lang="en-US" sz="1800" dirty="0"/>
           </a:p>
@@ -1475,7 +1514,25 @@
                 <a:ea typeface="Arial" pitchFamily="34" charset="-122"/>
                 <a:cs typeface="Arial" pitchFamily="34" charset="-120"/>
               </a:rPr>
-              <a:t>Beachhead: Navy; expansion: allied navies + commercial maritime security</a:t>
+              <a:t>Expansion: allied navies + commercial maritime security (ports, offshore energy)</a:t>
+            </a:r>
+            <a:endParaRPr lang="en-US" sz="1800" dirty="0"/>
+          </a:p>
+          <a:p>
+            <a:pPr marL="342900" indent="-342900">
+              <a:buSzPct val="100000"/>
+              <a:buChar char="•"/>
+            </a:pPr>
+            <a:r>
+              <a:rPr lang="en-US" sz="1800" dirty="0">
+                <a:solidFill>
+                  <a:srgbClr val="444444"/>
+                </a:solidFill>
+                <a:latin typeface="Arial" pitchFamily="34" charset="0"/>
+                <a:ea typeface="Arial" pitchFamily="34" charset="-122"/>
+                <a:cs typeface="Arial" pitchFamily="34" charset="-120"/>
+              </a:rPr>
+              <a:t>Serviceable market growing ~$8M → $60M+ per year by 2030</a:t>
             </a:r>
             <a:endParaRPr lang="en-US" sz="1800" dirty="0"/>
           </a:p>
@@ -1489,7 +1546,7 @@
         </p:nvSpPr>
         <p:spPr>
           <a:xfrm>
-            <a:off x="457200" y="2423160"/>
+            <a:off x="457200" y="2743200"/>
             <a:ext cx="11274552" cy="365760"/>
           </a:xfrm>
           <a:prstGeom prst="rect">
@@ -1593,7 +1650,7 @@
         <p:spPr>
           <a:xfrm>
             <a:off x="457200" y="1371600"/>
-            <a:ext cx="11274552" cy="960120"/>
+            <a:ext cx="11274552" cy="1280160"/>
           </a:xfrm>
           <a:prstGeom prst="rect">
             <a:avLst/>
@@ -1618,7 +1675,7 @@
                 <a:ea typeface="Arial" pitchFamily="34" charset="-122"/>
                 <a:cs typeface="Arial" pitchFamily="34" charset="-120"/>
               </a:rPr>
-              <a:t>Incumbents process acoustics shore-side (latency, comms-dependent)</a:t>
+              <a:t>Incumbents process acoustics shore-side → latency + comms dependence</a:t>
             </a:r>
             <a:endParaRPr lang="en-US" sz="1800" dirty="0"/>
           </a:p>
@@ -1636,7 +1693,7 @@
                 <a:ea typeface="Arial" pitchFamily="34" charset="-122"/>
                 <a:cs typeface="Arial" pitchFamily="34" charset="-120"/>
               </a:rPr>
-              <a:t>Aerivio runs fully on-vessel at 2 watts</a:t>
+              <a:t>Aerivio runs fully on-vessel at 2 watts, &lt;100 ms</a:t>
             </a:r>
             <a:endParaRPr lang="en-US" sz="1800" dirty="0"/>
           </a:p>
@@ -1655,6 +1712,91 @@
                 <a:cs typeface="Arial" pitchFamily="34" charset="-120"/>
               </a:rPr>
               <a:t>Defensible IP: saliency-guided quantization pipeline (patent pending)</a:t>
+            </a:r>
+            <a:endParaRPr lang="en-US" sz="1800" dirty="0"/>
+          </a:p>
+          <a:p>
+            <a:pPr marL="342900" indent="-342900">
+              <a:buSzPct val="100000"/>
+              <a:buChar char="•"/>
+            </a:pPr>
+            <a:r>
+              <a:rPr lang="en-US" sz="1800" dirty="0">
+                <a:solidFill>
+                  <a:srgbClr val="444444"/>
+                </a:solidFill>
+                <a:latin typeface="Arial" pitchFamily="34" charset="0"/>
+                <a:ea typeface="Arial" pitchFamily="34" charset="-122"/>
+                <a:cs typeface="Arial" pitchFamily="34" charset="-120"/>
+              </a:rPr>
+              <a:t>Retrofits deployed hulls — no new hardware program required</a:t>
+            </a:r>
+            <a:endParaRPr lang="en-US" sz="1800" dirty="0"/>
+          </a:p>
+        </p:txBody>
+      </p:sp>
+      <p:sp>
+        <p:nvSpPr>
+          <p:cNvPr id="4" name="Text 2"/>
+          <p:cNvSpPr/>
+          <p:nvPr/>
+        </p:nvSpPr>
+        <p:spPr>
+          <a:xfrm>
+            <a:off x="457200" y="2743200"/>
+            <a:ext cx="11274552" cy="548640"/>
+          </a:xfrm>
+          <a:prstGeom prst="rect">
+            <a:avLst/>
+          </a:prstGeom>
+          <a:noFill/>
+          <a:ln/>
+        </p:spPr>
+        <p:txBody>
+          <a:bodyPr wrap="square" rtlCol="0" anchor="t"/>
+          <a:lstStyle/>
+          <a:p>
+            <a:pPr indent="0" marL="0">
+              <a:buNone/>
+            </a:pPr>
+            <a:r>
+              <a:rPr lang="en-US" sz="1800" dirty="0">
+                <a:solidFill>
+                  <a:srgbClr val="444444"/>
+                </a:solidFill>
+                <a:latin typeface="Arial" pitchFamily="34" charset="0"/>
+                <a:ea typeface="Arial" pitchFamily="34" charset="-122"/>
+                <a:cs typeface="Arial" pitchFamily="34" charset="-120"/>
+              </a:rPr>
+              <a:t>Bottom line: we </a:t>
+            </a:r>
+            <a:pPr indent="0" marL="0">
+              <a:buNone/>
+            </a:pPr>
+            <a:r>
+              <a:rPr lang="en-US" sz="1800" b="1" dirty="0">
+                <a:solidFill>
+                  <a:srgbClr val="444444"/>
+                </a:solidFill>
+                <a:latin typeface="Arial" pitchFamily="34" charset="0"/>
+                <a:ea typeface="Arial" pitchFamily="34" charset="-122"/>
+                <a:cs typeface="Arial" pitchFamily="34" charset="-120"/>
+              </a:rPr>
+              <a:t>win where connectivity fails</a:t>
+            </a:r>
+            <a:pPr indent="0" marL="0">
+              <a:buNone/>
+            </a:pPr>
+            <a:r>
+              <a:rPr lang="en-US" sz="1800" dirty="0">
+                <a:solidFill>
+                  <a:srgbClr val="444444"/>
+                </a:solidFill>
+                <a:latin typeface="Arial" pitchFamily="34" charset="0"/>
+                <a:ea typeface="Arial" pitchFamily="34" charset="-122"/>
+                <a:cs typeface="Arial" pitchFamily="34" charset="-120"/>
+              </a:rPr>
+              <a:t> — exactly the contested environment that matters.</a:t>
             </a:r>
             <a:endParaRPr lang="en-US" sz="1800" dirty="0"/>
           </a:p>
@@ -1759,7 +1901,7 @@
                 <a:ea typeface="Arial" pitchFamily="34" charset="-122"/>
                 <a:cs typeface="Arial" pitchFamily="34" charset="-120"/>
               </a:rPr>
-              <a:t>Phase I: feasibility on Navy corpus (months 1–6)</a:t>
+              <a:t>Phase I (now): feasibility on the Navy corpus, months 1–6</a:t>
             </a:r>
             <a:endParaRPr lang="en-US" sz="1800" dirty="0"/>
           </a:p>
@@ -1778,7 +1920,7 @@
                 <a:ea typeface="Arial" pitchFamily="34" charset="-122"/>
                 <a:cs typeface="Arial" pitchFamily="34" charset="-120"/>
               </a:rPr>
-              <a:t>Phase II: hardened module + at-sea trials</a:t>
+              <a:t>Phase II: hardened module + at-sea demonstration (~$1.1M / 24 mo)</a:t>
             </a:r>
             <a:endParaRPr lang="en-US" sz="1800" dirty="0"/>
           </a:p>
@@ -1797,7 +1939,7 @@
                 <a:ea typeface="Arial" pitchFamily="34" charset="-122"/>
                 <a:cs typeface="Arial" pitchFamily="34" charset="-120"/>
               </a:rPr>
-              <a:t>Phase III: transition to PEO USC program of record</a:t>
+              <a:t>Phase III: transition to a Navy USV program of record</a:t>
             </a:r>
             <a:endParaRPr lang="en-US" sz="1800" dirty="0"/>
           </a:p>
@@ -1816,7 +1958,46 @@
                 <a:ea typeface="Arial" pitchFamily="34" charset="-122"/>
                 <a:cs typeface="Arial" pitchFamily="34" charset="-120"/>
               </a:rPr>
-              <a:t>Commercial: port-security &amp; offshore-energy monitoring</a:t>
+              <a:t>Commercial: port-security &amp; offshore-energy monitoring (dual-use)</a:t>
+            </a:r>
+            <a:endParaRPr lang="en-US" sz="1800" dirty="0"/>
+          </a:p>
+        </p:txBody>
+      </p:sp>
+      <p:sp>
+        <p:nvSpPr>
+          <p:cNvPr id="4" name="Text 2"/>
+          <p:cNvSpPr/>
+          <p:nvPr/>
+        </p:nvSpPr>
+        <p:spPr>
+          <a:xfrm>
+            <a:off x="457200" y="2743200"/>
+            <a:ext cx="11274552" cy="548640"/>
+          </a:xfrm>
+          <a:prstGeom prst="rect">
+            <a:avLst/>
+          </a:prstGeom>
+          <a:noFill/>
+          <a:ln/>
+        </p:spPr>
+        <p:txBody>
+          <a:bodyPr wrap="square" rtlCol="0" anchor="t"/>
+          <a:lstStyle/>
+          <a:p>
+            <a:pPr indent="0" marL="0">
+              <a:buNone/>
+            </a:pPr>
+            <a:r>
+              <a:rPr lang="en-US" sz="1800" dirty="0">
+                <a:solidFill>
+                  <a:srgbClr val="444444"/>
+                </a:solidFill>
+                <a:latin typeface="Arial" pitchFamily="34" charset="0"/>
+                <a:ea typeface="Arial" pitchFamily="34" charset="-122"/>
+                <a:cs typeface="Arial" pitchFamily="34" charset="-120"/>
+              </a:rPr>
+              <a:t>Transition is a software integration, not a hardware program — a low-barrier path to a funded home.</a:t>
             </a:r>
             <a:endParaRPr lang="en-US" sz="1800" dirty="0"/>
           </a:p>
@@ -1880,7 +2061,7 @@
                 <a:ea typeface="Arial" pitchFamily="34" charset="-122"/>
                 <a:cs typeface="Arial" pitchFamily="34" charset="-120"/>
               </a:rPr>
-              <a:t>Financials &amp; Ask</a:t>
+              <a:t>Financials &amp; The Ask</a:t>
             </a:r>
             <a:endParaRPr lang="en-US" sz="2800" dirty="0"/>
           </a:p>
@@ -1962,7 +2143,7 @@
         <p:spPr>
           <a:xfrm>
             <a:off x="457200" y="1828800"/>
-            <a:ext cx="11274552" cy="960120"/>
+            <a:ext cx="11274552" cy="1280160"/>
           </a:xfrm>
           <a:prstGeom prst="rect">
             <a:avLst/>
@@ -1987,7 +2168,7 @@
                 <a:ea typeface="Arial" pitchFamily="34" charset="-122"/>
                 <a:cs typeface="Arial" pitchFamily="34" charset="-120"/>
               </a:rPr>
-              <a:t>Team of 3 (PI + 2 engineers)</a:t>
+              <a:t>Team of 3 (PI + systems + ML engineer)</a:t>
             </a:r>
             <a:endParaRPr lang="en-US" sz="1800" dirty="0"/>
           </a:p>
@@ -2005,7 +2186,7 @@
                 <a:ea typeface="Arial" pitchFamily="34" charset="-122"/>
                 <a:cs typeface="Arial" pitchFamily="34" charset="-120"/>
               </a:rPr>
-              <a:t>Deliverable: validated 4-bit edge classifier</a:t>
+              <a:t>Deliverable: validated 4-bit edge classifier meeting all three gates</a:t>
             </a:r>
             <a:endParaRPr lang="en-US" sz="1800" dirty="0"/>
           </a:p>
@@ -2023,7 +2204,64 @@
                 <a:ea typeface="Arial" pitchFamily="34" charset="-122"/>
                 <a:cs typeface="Arial" pitchFamily="34" charset="-120"/>
               </a:rPr>
-              <a:t>Phase II target: $1.1M for at-sea demonstration</a:t>
+              <a:t>Phase II target: $1.1M for an at-sea demonstration</a:t>
+            </a:r>
+            <a:endParaRPr lang="en-US" sz="1800" dirty="0"/>
+          </a:p>
+          <a:p>
+            <a:pPr marL="342900" indent="-342900">
+              <a:buSzPct val="100000"/>
+              <a:buChar char="•"/>
+            </a:pPr>
+            <a:r>
+              <a:rPr lang="en-US" sz="1800" dirty="0">
+                <a:solidFill>
+                  <a:srgbClr val="444444"/>
+                </a:solidFill>
+                <a:latin typeface="Arial" pitchFamily="34" charset="0"/>
+                <a:ea typeface="Arial" pitchFamily="34" charset="-122"/>
+                <a:cs typeface="Arial" pitchFamily="34" charset="-120"/>
+              </a:rPr>
+              <a:t>Commercial revenue path reduces single-program reliance</a:t>
+            </a:r>
+            <a:endParaRPr lang="en-US" sz="1800" dirty="0"/>
+          </a:p>
+        </p:txBody>
+      </p:sp>
+      <p:sp>
+        <p:nvSpPr>
+          <p:cNvPr id="5" name="Text 3"/>
+          <p:cNvSpPr/>
+          <p:nvPr/>
+        </p:nvSpPr>
+        <p:spPr>
+          <a:xfrm>
+            <a:off x="457200" y="3200400"/>
+            <a:ext cx="11274552" cy="365760"/>
+          </a:xfrm>
+          <a:prstGeom prst="rect">
+            <a:avLst/>
+          </a:prstGeom>
+          <a:noFill/>
+          <a:ln/>
+        </p:spPr>
+        <p:txBody>
+          <a:bodyPr wrap="square" rtlCol="0" anchor="t"/>
+          <a:lstStyle/>
+          <a:p>
+            <a:pPr indent="0" marL="0">
+              <a:buNone/>
+            </a:pPr>
+            <a:r>
+              <a:rPr lang="en-US" sz="1800" dirty="0">
+                <a:solidFill>
+                  <a:srgbClr val="444444"/>
+                </a:solidFill>
+                <a:latin typeface="Arial" pitchFamily="34" charset="0"/>
+                <a:ea typeface="Arial" pitchFamily="34" charset="-122"/>
+                <a:cs typeface="Arial" pitchFamily="34" charset="-120"/>
+              </a:rPr>
+              <a:t>Ask: fund Phase I to de-risk the edge classifier and unlock the transition path.</a:t>
             </a:r>
             <a:endParaRPr lang="en-US" sz="1800" dirty="0"/>
           </a:p>

--- a/docs/sample-proposal/Aerivio_Commercialization.pptx
+++ b/docs/sample-proposal/Aerivio_Commercialization.pptx
@@ -1374,7 +1374,7 @@
                 <a:ea typeface="Arial" pitchFamily="34" charset="-122"/>
                 <a:cs typeface="Arial" pitchFamily="34" charset="-120"/>
               </a:rPr>
-              <a:t>Topic N251-042 · US Navy · $150,000 / 6 months</a:t>
+              <a:t>Topic N251-042 · AFWERX SBIR Phase I (CSO) · $150,000 / 6 months</a:t>
             </a:r>
             <a:endParaRPr lang="en-US" sz="1800" dirty="0"/>
           </a:p>
@@ -1478,7 +1478,7 @@
                 <a:ea typeface="Arial" pitchFamily="34" charset="-122"/>
                 <a:cs typeface="Arial" pitchFamily="34" charset="-120"/>
               </a:rPr>
-              <a:t>Navy USV fleet projected to exceed 300 hulls by 2030 — each needs edge acoustic sensing</a:t>
+              <a:t>DoD USV fleet (Air Force &amp; Navy) projected to exceed 300 hulls by 2030 — each needs edge acoustic sensing</a:t>
             </a:r>
             <a:endParaRPr lang="en-US" sz="1800" dirty="0"/>
           </a:p>
@@ -1496,7 +1496,7 @@
                 <a:ea typeface="Arial" pitchFamily="34" charset="-122"/>
                 <a:cs typeface="Arial" pitchFamily="34" charset="-120"/>
               </a:rPr>
-              <a:t>Beachhead: US Navy programs of record</a:t>
+              <a:t>Beachhead: DoD USV programs of record</a:t>
             </a:r>
             <a:endParaRPr lang="en-US" sz="1800" dirty="0"/>
           </a:p>
@@ -1901,7 +1901,7 @@
                 <a:ea typeface="Arial" pitchFamily="34" charset="-122"/>
                 <a:cs typeface="Arial" pitchFamily="34" charset="-120"/>
               </a:rPr>
-              <a:t>Phase I (now): feasibility on the Navy corpus, months 1–6</a:t>
+              <a:t>Phase I (now): feasibility on the maritime corpus, months 1–6</a:t>
             </a:r>
             <a:endParaRPr lang="en-US" sz="1800" dirty="0"/>
           </a:p>
@@ -1939,7 +1939,7 @@
                 <a:ea typeface="Arial" pitchFamily="34" charset="-122"/>
                 <a:cs typeface="Arial" pitchFamily="34" charset="-120"/>
               </a:rPr>
-              <a:t>Phase III: transition to a Navy USV program of record</a:t>
+              <a:t>Phase III: transition to a DoD USV program of record</a:t>
             </a:r>
             <a:endParaRPr lang="en-US" sz="1800" dirty="0"/>
           </a:p>

--- a/docs/sample-proposal/Aerivio_Commercialization.pptx
+++ b/docs/sample-proposal/Aerivio_Commercialization.pptx
@@ -1210,6 +1210,13 @@
 <file path=ppt/slides/slide1.xml><?xml version="1.0" encoding="utf-8"?>
 <p:sld xmlns:a="http://schemas.openxmlformats.org/drawingml/2006/main" xmlns:r="http://schemas.openxmlformats.org/officeDocument/2006/relationships" xmlns:p="http://schemas.openxmlformats.org/presentationml/2006/main">
   <p:cSld name="Slide 1">
+    <p:bg>
+      <p:bgPr>
+        <a:solidFill>
+          <a:srgbClr val="FFFFFF"/>
+        </a:solidFill>
+      </p:bgPr>
+    </p:bg>
     <p:spTree>
       <p:nvGrpSpPr>
         <p:cNvPr id="1" name=""/>
@@ -1226,42 +1233,23 @@
       </p:grpSpPr>
       <p:sp>
         <p:nvSpPr>
-          <p:cNvPr id="2" name="Text 0"/>
+          <p:cNvPr id="2" name="Shape 0"/>
           <p:cNvSpPr/>
           <p:nvPr/>
         </p:nvSpPr>
         <p:spPr>
           <a:xfrm>
-            <a:off x="457200" y="274320"/>
-            <a:ext cx="11274552" cy="914400"/>
-          </a:xfrm>
-          <a:prstGeom prst="rect">
-            <a:avLst/>
-          </a:prstGeom>
-          <a:noFill/>
+            <a:off x="0" y="0"/>
+            <a:ext cx="12188952" cy="2286000"/>
+          </a:xfrm>
+          <a:prstGeom prst="rect">
+            <a:avLst/>
+          </a:prstGeom>
+          <a:solidFill>
+            <a:srgbClr val="3730A3"/>
+          </a:solidFill>
           <a:ln/>
         </p:spPr>
-        <p:txBody>
-          <a:bodyPr wrap="square" rtlCol="0" anchor="b"/>
-          <a:lstStyle/>
-          <a:p>
-            <a:pPr indent="0" marL="0">
-              <a:buNone/>
-            </a:pPr>
-            <a:r>
-              <a:rPr lang="en-US" sz="2800" b="1" dirty="0">
-                <a:solidFill>
-                  <a:srgbClr val="333333"/>
-                </a:solidFill>
-                <a:latin typeface="Arial" pitchFamily="34" charset="0"/>
-                <a:ea typeface="Arial" pitchFamily="34" charset="-122"/>
-                <a:cs typeface="Arial" pitchFamily="34" charset="-120"/>
-              </a:rPr>
-              <a:t>Aerivio Systems</a:t>
-            </a:r>
-            <a:endParaRPr lang="en-US" sz="2800" dirty="0"/>
-          </a:p>
-        </p:txBody>
       </p:sp>
       <p:sp>
         <p:nvSpPr>
@@ -1271,8 +1259,8 @@
         </p:nvSpPr>
         <p:spPr>
           <a:xfrm>
-            <a:off x="457200" y="1371600"/>
-            <a:ext cx="11274552" cy="365760"/>
+            <a:off x="548640" y="640080"/>
+            <a:ext cx="11091672" cy="1097280"/>
           </a:xfrm>
           <a:prstGeom prst="rect">
             <a:avLst/>
@@ -1281,24 +1269,24 @@
           <a:ln/>
         </p:spPr>
         <p:txBody>
-          <a:bodyPr wrap="square" rtlCol="0" anchor="t"/>
+          <a:bodyPr wrap="square" rtlCol="0" anchor="ctr"/>
           <a:lstStyle/>
           <a:p>
             <a:pPr indent="0" marL="0">
               <a:buNone/>
             </a:pPr>
             <a:r>
-              <a:rPr lang="en-US" sz="1800" dirty="0">
-                <a:solidFill>
-                  <a:srgbClr val="444444"/>
-                </a:solidFill>
-                <a:latin typeface="Arial" pitchFamily="34" charset="0"/>
-                <a:ea typeface="Arial" pitchFamily="34" charset="-122"/>
-                <a:cs typeface="Arial" pitchFamily="34" charset="-120"/>
-              </a:rPr>
-              <a:t>Commercialization Plan — SBIR Phase I</a:t>
-            </a:r>
-            <a:endParaRPr lang="en-US" sz="1800" dirty="0"/>
+              <a:rPr lang="en-US" sz="4000" b="1" dirty="0">
+                <a:solidFill>
+                  <a:srgbClr val="FFFFFF"/>
+                </a:solidFill>
+                <a:latin typeface="Arial" pitchFamily="34" charset="0"/>
+                <a:ea typeface="Arial" pitchFamily="34" charset="-122"/>
+                <a:cs typeface="Arial" pitchFamily="34" charset="-120"/>
+              </a:rPr>
+              <a:t>Aerivio Systems</a:t>
+            </a:r>
+            <a:endParaRPr lang="en-US" sz="4000" dirty="0"/>
           </a:p>
         </p:txBody>
       </p:sp>
@@ -1310,8 +1298,8 @@
         </p:nvSpPr>
         <p:spPr>
           <a:xfrm>
-            <a:off x="457200" y="1828800"/>
-            <a:ext cx="11274552" cy="365760"/>
+            <a:off x="548640" y="2743200"/>
+            <a:ext cx="11091672" cy="457200"/>
           </a:xfrm>
           <a:prstGeom prst="rect">
             <a:avLst/>
@@ -1327,17 +1315,17 @@
               <a:buNone/>
             </a:pPr>
             <a:r>
-              <a:rPr lang="en-US" sz="1800" dirty="0">
-                <a:solidFill>
-                  <a:srgbClr val="444444"/>
-                </a:solidFill>
-                <a:latin typeface="Arial" pitchFamily="34" charset="0"/>
-                <a:ea typeface="Arial" pitchFamily="34" charset="-122"/>
-                <a:cs typeface="Arial" pitchFamily="34" charset="-120"/>
-              </a:rPr>
-              <a:t>Edge-AI acoustic threat classification for unmanned surface vessels</a:t>
-            </a:r>
-            <a:endParaRPr lang="en-US" sz="1800" dirty="0"/>
+              <a:rPr lang="en-US" sz="2200" b="1" dirty="0">
+                <a:solidFill>
+                  <a:srgbClr val="1E293B"/>
+                </a:solidFill>
+                <a:latin typeface="Arial" pitchFamily="34" charset="0"/>
+                <a:ea typeface="Arial" pitchFamily="34" charset="-122"/>
+                <a:cs typeface="Arial" pitchFamily="34" charset="-120"/>
+              </a:rPr>
+              <a:t>Commercialization Plan — SBIR Phase I</a:t>
+            </a:r>
+            <a:endParaRPr lang="en-US" sz="2200" dirty="0"/>
           </a:p>
         </p:txBody>
       </p:sp>
@@ -1349,8 +1337,8 @@
         </p:nvSpPr>
         <p:spPr>
           <a:xfrm>
-            <a:off x="457200" y="2286000"/>
-            <a:ext cx="11274552" cy="365760"/>
+            <a:off x="548640" y="3383280"/>
+            <a:ext cx="11091672" cy="457200"/>
           </a:xfrm>
           <a:prstGeom prst="rect">
             <a:avLst/>
@@ -1366,9 +1354,48 @@
               <a:buNone/>
             </a:pPr>
             <a:r>
-              <a:rPr lang="en-US" sz="1800" dirty="0">
-                <a:solidFill>
-                  <a:srgbClr val="444444"/>
+              <a:rPr lang="en-US" sz="1600" dirty="0">
+                <a:solidFill>
+                  <a:srgbClr val="64748B"/>
+                </a:solidFill>
+                <a:latin typeface="Arial" pitchFamily="34" charset="0"/>
+                <a:ea typeface="Arial" pitchFamily="34" charset="-122"/>
+                <a:cs typeface="Arial" pitchFamily="34" charset="-120"/>
+              </a:rPr>
+              <a:t>Edge-AI acoustic threat classification for unmanned surface vessels</a:t>
+            </a:r>
+            <a:endParaRPr lang="en-US" sz="1600" dirty="0"/>
+          </a:p>
+        </p:txBody>
+      </p:sp>
+      <p:sp>
+        <p:nvSpPr>
+          <p:cNvPr id="6" name="Text 4"/>
+          <p:cNvSpPr/>
+          <p:nvPr/>
+        </p:nvSpPr>
+        <p:spPr>
+          <a:xfrm>
+            <a:off x="548640" y="3794760"/>
+            <a:ext cx="11091672" cy="457200"/>
+          </a:xfrm>
+          <a:prstGeom prst="rect">
+            <a:avLst/>
+          </a:prstGeom>
+          <a:noFill/>
+          <a:ln/>
+        </p:spPr>
+        <p:txBody>
+          <a:bodyPr wrap="square" rtlCol="0" anchor="t"/>
+          <a:lstStyle/>
+          <a:p>
+            <a:pPr indent="0" marL="0">
+              <a:buNone/>
+            </a:pPr>
+            <a:r>
+              <a:rPr lang="en-US" sz="1600" dirty="0">
+                <a:solidFill>
+                  <a:srgbClr val="64748B"/>
                 </a:solidFill>
                 <a:latin typeface="Arial" pitchFamily="34" charset="0"/>
                 <a:ea typeface="Arial" pitchFamily="34" charset="-122"/>
@@ -1376,9 +1403,29 @@
               </a:rPr>
               <a:t>Topic N251-042 · AFWERX SBIR Phase I (CSO) · $150,000 / 6 months</a:t>
             </a:r>
-            <a:endParaRPr lang="en-US" sz="1800" dirty="0"/>
-          </a:p>
-        </p:txBody>
+            <a:endParaRPr lang="en-US" sz="1600" dirty="0"/>
+          </a:p>
+        </p:txBody>
+      </p:sp>
+      <p:sp>
+        <p:nvSpPr>
+          <p:cNvPr id="7" name="Shape 5"/>
+          <p:cNvSpPr/>
+          <p:nvPr/>
+        </p:nvSpPr>
+        <p:spPr>
+          <a:xfrm>
+            <a:off x="0" y="6601968"/>
+            <a:ext cx="12188952" cy="256032"/>
+          </a:xfrm>
+          <a:prstGeom prst="rect">
+            <a:avLst/>
+          </a:prstGeom>
+          <a:solidFill>
+            <a:srgbClr val="3730A3"/>
+          </a:solidFill>
+          <a:ln/>
+        </p:spPr>
       </p:sp>
     </p:spTree>
   </p:cSld>
@@ -1391,6 +1438,13 @@
 <file path=ppt/slides/slide2.xml><?xml version="1.0" encoding="utf-8"?>
 <p:sld xmlns:a="http://schemas.openxmlformats.org/drawingml/2006/main" xmlns:r="http://schemas.openxmlformats.org/officeDocument/2006/relationships" xmlns:p="http://schemas.openxmlformats.org/presentationml/2006/main">
   <p:cSld name="Slide 2">
+    <p:bg>
+      <p:bgPr>
+        <a:solidFill>
+          <a:srgbClr val="FFFFFF"/>
+        </a:solidFill>
+      </p:bgPr>
+    </p:bg>
     <p:spTree>
       <p:nvGrpSpPr>
         <p:cNvPr id="1" name=""/>
@@ -1407,42 +1461,23 @@
       </p:grpSpPr>
       <p:sp>
         <p:nvSpPr>
-          <p:cNvPr id="2" name="Text 0"/>
+          <p:cNvPr id="2" name="Shape 0"/>
           <p:cNvSpPr/>
           <p:nvPr/>
         </p:nvSpPr>
         <p:spPr>
           <a:xfrm>
-            <a:off x="457200" y="274320"/>
-            <a:ext cx="11274552" cy="914400"/>
-          </a:xfrm>
-          <a:prstGeom prst="rect">
-            <a:avLst/>
-          </a:prstGeom>
-          <a:noFill/>
+            <a:off x="0" y="0"/>
+            <a:ext cx="146304" cy="6858000"/>
+          </a:xfrm>
+          <a:prstGeom prst="rect">
+            <a:avLst/>
+          </a:prstGeom>
+          <a:solidFill>
+            <a:srgbClr val="3730A3"/>
+          </a:solidFill>
           <a:ln/>
         </p:spPr>
-        <p:txBody>
-          <a:bodyPr wrap="square" rtlCol="0" anchor="b"/>
-          <a:lstStyle/>
-          <a:p>
-            <a:pPr indent="0" marL="0">
-              <a:buNone/>
-            </a:pPr>
-            <a:r>
-              <a:rPr lang="en-US" sz="2800" b="1" dirty="0">
-                <a:solidFill>
-                  <a:srgbClr val="333333"/>
-                </a:solidFill>
-                <a:latin typeface="Arial" pitchFamily="34" charset="0"/>
-                <a:ea typeface="Arial" pitchFamily="34" charset="-122"/>
-                <a:cs typeface="Arial" pitchFamily="34" charset="-120"/>
-              </a:rPr>
-              <a:t>Market Opportunity</a:t>
-            </a:r>
-            <a:endParaRPr lang="en-US" sz="2800" dirty="0"/>
-          </a:p>
-        </p:txBody>
       </p:sp>
       <p:sp>
         <p:nvSpPr>
@@ -1452,8 +1487,8 @@
         </p:nvSpPr>
         <p:spPr>
           <a:xfrm>
-            <a:off x="457200" y="1371600"/>
-            <a:ext cx="11274552" cy="1280160"/>
+            <a:off x="548640" y="384048"/>
+            <a:ext cx="11091672" cy="822960"/>
           </a:xfrm>
           <a:prstGeom prst="rect">
             <a:avLst/>
@@ -1462,17 +1497,82 @@
           <a:ln/>
         </p:spPr>
         <p:txBody>
+          <a:bodyPr wrap="square" rtlCol="0" anchor="b"/>
+          <a:lstStyle/>
+          <a:p>
+            <a:pPr indent="0" marL="0">
+              <a:buNone/>
+            </a:pPr>
+            <a:r>
+              <a:rPr lang="en-US" sz="3000" b="1" dirty="0">
+                <a:solidFill>
+                  <a:srgbClr val="3730A3"/>
+                </a:solidFill>
+                <a:latin typeface="Arial" pitchFamily="34" charset="0"/>
+                <a:ea typeface="Arial" pitchFamily="34" charset="-122"/>
+                <a:cs typeface="Arial" pitchFamily="34" charset="-120"/>
+              </a:rPr>
+              <a:t>Market Opportunity</a:t>
+            </a:r>
+            <a:endParaRPr lang="en-US" sz="3000" dirty="0"/>
+          </a:p>
+        </p:txBody>
+      </p:sp>
+      <p:sp>
+        <p:nvSpPr>
+          <p:cNvPr id="4" name="Shape 2"/>
+          <p:cNvSpPr/>
+          <p:nvPr/>
+        </p:nvSpPr>
+        <p:spPr>
+          <a:xfrm>
+            <a:off x="566928" y="1243584"/>
+            <a:ext cx="2194560" cy="50292"/>
+          </a:xfrm>
+          <a:prstGeom prst="rect">
+            <a:avLst/>
+          </a:prstGeom>
+          <a:solidFill>
+            <a:srgbClr val="3730A3"/>
+          </a:solidFill>
+          <a:ln/>
+        </p:spPr>
+      </p:sp>
+      <p:sp>
+        <p:nvSpPr>
+          <p:cNvPr id="5" name="Text 3"/>
+          <p:cNvSpPr/>
+          <p:nvPr/>
+        </p:nvSpPr>
+        <p:spPr>
+          <a:xfrm>
+            <a:off x="548640" y="1554480"/>
+            <a:ext cx="11091672" cy="1536192"/>
+          </a:xfrm>
+          <a:prstGeom prst="rect">
+            <a:avLst/>
+          </a:prstGeom>
+          <a:noFill/>
+          <a:ln/>
+        </p:spPr>
+        <p:txBody>
           <a:bodyPr wrap="square" rtlCol="0" anchor="t"/>
           <a:lstStyle/>
           <a:p>
-            <a:pPr marL="342900" indent="-342900">
+            <a:pPr marL="228600" indent="-228600">
+              <a:lnSpc>
+                <a:spcPct val="105000"/>
+              </a:lnSpc>
+              <a:spcAft>
+                <a:spcPts val="800"/>
+              </a:spcAft>
               <a:buSzPct val="100000"/>
               <a:buChar char="•"/>
             </a:pPr>
             <a:r>
               <a:rPr lang="en-US" sz="1800" dirty="0">
                 <a:solidFill>
-                  <a:srgbClr val="444444"/>
+                  <a:srgbClr val="1E293B"/>
                 </a:solidFill>
                 <a:latin typeface="Arial" pitchFamily="34" charset="0"/>
                 <a:ea typeface="Arial" pitchFamily="34" charset="-122"/>
@@ -1483,14 +1583,20 @@
             <a:endParaRPr lang="en-US" sz="1800" dirty="0"/>
           </a:p>
           <a:p>
-            <a:pPr marL="342900" indent="-342900">
+            <a:pPr marL="228600" indent="-228600">
+              <a:lnSpc>
+                <a:spcPct val="105000"/>
+              </a:lnSpc>
+              <a:spcAft>
+                <a:spcPts val="800"/>
+              </a:spcAft>
               <a:buSzPct val="100000"/>
               <a:buChar char="•"/>
             </a:pPr>
             <a:r>
               <a:rPr lang="en-US" sz="1800" dirty="0">
                 <a:solidFill>
-                  <a:srgbClr val="444444"/>
+                  <a:srgbClr val="1E293B"/>
                 </a:solidFill>
                 <a:latin typeface="Arial" pitchFamily="34" charset="0"/>
                 <a:ea typeface="Arial" pitchFamily="34" charset="-122"/>
@@ -1501,14 +1607,20 @@
             <a:endParaRPr lang="en-US" sz="1800" dirty="0"/>
           </a:p>
           <a:p>
-            <a:pPr marL="342900" indent="-342900">
+            <a:pPr marL="228600" indent="-228600">
+              <a:lnSpc>
+                <a:spcPct val="105000"/>
+              </a:lnSpc>
+              <a:spcAft>
+                <a:spcPts val="800"/>
+              </a:spcAft>
               <a:buSzPct val="100000"/>
               <a:buChar char="•"/>
             </a:pPr>
             <a:r>
               <a:rPr lang="en-US" sz="1800" dirty="0">
                 <a:solidFill>
-                  <a:srgbClr val="444444"/>
+                  <a:srgbClr val="1E293B"/>
                 </a:solidFill>
                 <a:latin typeface="Arial" pitchFamily="34" charset="0"/>
                 <a:ea typeface="Arial" pitchFamily="34" charset="-122"/>
@@ -1519,14 +1631,20 @@
             <a:endParaRPr lang="en-US" sz="1800" dirty="0"/>
           </a:p>
           <a:p>
-            <a:pPr marL="342900" indent="-342900">
+            <a:pPr marL="228600" indent="-228600">
+              <a:lnSpc>
+                <a:spcPct val="105000"/>
+              </a:lnSpc>
+              <a:spcAft>
+                <a:spcPts val="800"/>
+              </a:spcAft>
               <a:buSzPct val="100000"/>
               <a:buChar char="•"/>
             </a:pPr>
             <a:r>
               <a:rPr lang="en-US" sz="1800" dirty="0">
                 <a:solidFill>
-                  <a:srgbClr val="444444"/>
+                  <a:srgbClr val="1E293B"/>
                 </a:solidFill>
                 <a:latin typeface="Arial" pitchFamily="34" charset="0"/>
                 <a:ea typeface="Arial" pitchFamily="34" charset="-122"/>
@@ -1538,16 +1656,40 @@
           </a:p>
         </p:txBody>
       </p:sp>
-      <p:sp>
-        <p:nvSpPr>
-          <p:cNvPr id="4" name="Text 2"/>
+      <p:pic>
+        <p:nvPicPr>
+          <p:cNvPr id="6" name="Image 0" descr="preencoded.png">    </p:cNvPr>
+          <p:cNvPicPr>
+            <a:picLocks noChangeAspect="1"/>
+          </p:cNvPicPr>
+          <p:nvPr/>
+        </p:nvPicPr>
+        <p:blipFill>
+          <a:blip r:embed="rId1"/>
+          <a:stretch>
+            <a:fillRect/>
+          </a:stretch>
+        </p:blipFill>
+        <p:spPr>
+          <a:xfrm>
+            <a:off x="2985516" y="3200400"/>
+            <a:ext cx="6217920" cy="2826327"/>
+          </a:xfrm>
+          <a:prstGeom prst="rect">
+            <a:avLst/>
+          </a:prstGeom>
+        </p:spPr>
+      </p:pic>
+      <p:sp>
+        <p:nvSpPr>
+          <p:cNvPr id="7" name="Text 4"/>
           <p:cNvSpPr/>
           <p:nvPr/>
         </p:nvSpPr>
         <p:spPr>
           <a:xfrm>
-            <a:off x="457200" y="2743200"/>
-            <a:ext cx="11274552" cy="365760"/>
+            <a:off x="11274552" y="6446520"/>
+            <a:ext cx="548640" cy="274320"/>
           </a:xfrm>
           <a:prstGeom prst="rect">
             <a:avLst/>
@@ -1559,21 +1701,21 @@
           <a:bodyPr wrap="square" rtlCol="0" anchor="ctr"/>
           <a:lstStyle/>
           <a:p>
-            <a:pPr algn="ctr" indent="0" marL="0">
+            <a:pPr algn="r" indent="0" marL="0">
               <a:buNone/>
             </a:pPr>
             <a:r>
-              <a:rPr lang="en-US" sz="1600" i="1" dirty="0">
-                <a:solidFill>
-                  <a:srgbClr val="999999"/>
-                </a:solidFill>
-                <a:latin typeface="Arial" pitchFamily="34" charset="0"/>
-                <a:ea typeface="Arial" pitchFamily="34" charset="-122"/>
-                <a:cs typeface="Arial" pitchFamily="34" charset="-120"/>
-              </a:rPr>
-              <a:t>[Image: Market growth chart]</a:t>
-            </a:r>
-            <a:endParaRPr lang="en-US" sz="1600" dirty="0"/>
+              <a:rPr lang="en-US" sz="1000" dirty="0">
+                <a:solidFill>
+                  <a:srgbClr val="64748B"/>
+                </a:solidFill>
+                <a:latin typeface="Arial" pitchFamily="34" charset="0"/>
+                <a:ea typeface="Arial" pitchFamily="34" charset="-122"/>
+                <a:cs typeface="Arial" pitchFamily="34" charset="-120"/>
+              </a:rPr>
+              <a:t>2</a:t>
+            </a:r>
+            <a:endParaRPr lang="en-US" sz="1000" dirty="0"/>
           </a:p>
         </p:txBody>
       </p:sp>
@@ -1588,6 +1730,13 @@
 <file path=ppt/slides/slide3.xml><?xml version="1.0" encoding="utf-8"?>
 <p:sld xmlns:a="http://schemas.openxmlformats.org/drawingml/2006/main" xmlns:r="http://schemas.openxmlformats.org/officeDocument/2006/relationships" xmlns:p="http://schemas.openxmlformats.org/presentationml/2006/main">
   <p:cSld name="Slide 3">
+    <p:bg>
+      <p:bgPr>
+        <a:solidFill>
+          <a:srgbClr val="FFFFFF"/>
+        </a:solidFill>
+      </p:bgPr>
+    </p:bg>
     <p:spTree>
       <p:nvGrpSpPr>
         <p:cNvPr id="1" name=""/>
@@ -1604,42 +1753,23 @@
       </p:grpSpPr>
       <p:sp>
         <p:nvSpPr>
-          <p:cNvPr id="2" name="Text 0"/>
+          <p:cNvPr id="2" name="Shape 0"/>
           <p:cNvSpPr/>
           <p:nvPr/>
         </p:nvSpPr>
         <p:spPr>
           <a:xfrm>
-            <a:off x="457200" y="274320"/>
-            <a:ext cx="11274552" cy="914400"/>
-          </a:xfrm>
-          <a:prstGeom prst="rect">
-            <a:avLst/>
-          </a:prstGeom>
-          <a:noFill/>
+            <a:off x="0" y="0"/>
+            <a:ext cx="146304" cy="6858000"/>
+          </a:xfrm>
+          <a:prstGeom prst="rect">
+            <a:avLst/>
+          </a:prstGeom>
+          <a:solidFill>
+            <a:srgbClr val="3730A3"/>
+          </a:solidFill>
           <a:ln/>
         </p:spPr>
-        <p:txBody>
-          <a:bodyPr wrap="square" rtlCol="0" anchor="b"/>
-          <a:lstStyle/>
-          <a:p>
-            <a:pPr indent="0" marL="0">
-              <a:buNone/>
-            </a:pPr>
-            <a:r>
-              <a:rPr lang="en-US" sz="2800" b="1" dirty="0">
-                <a:solidFill>
-                  <a:srgbClr val="333333"/>
-                </a:solidFill>
-                <a:latin typeface="Arial" pitchFamily="34" charset="0"/>
-                <a:ea typeface="Arial" pitchFamily="34" charset="-122"/>
-                <a:cs typeface="Arial" pitchFamily="34" charset="-120"/>
-              </a:rPr>
-              <a:t>Competition &amp; Differentiation</a:t>
-            </a:r>
-            <a:endParaRPr lang="en-US" sz="2800" dirty="0"/>
-          </a:p>
-        </p:txBody>
       </p:sp>
       <p:sp>
         <p:nvSpPr>
@@ -1649,8 +1779,8 @@
         </p:nvSpPr>
         <p:spPr>
           <a:xfrm>
-            <a:off x="457200" y="1371600"/>
-            <a:ext cx="11274552" cy="1280160"/>
+            <a:off x="548640" y="384048"/>
+            <a:ext cx="11091672" cy="822960"/>
           </a:xfrm>
           <a:prstGeom prst="rect">
             <a:avLst/>
@@ -1659,17 +1789,82 @@
           <a:ln/>
         </p:spPr>
         <p:txBody>
+          <a:bodyPr wrap="square" rtlCol="0" anchor="b"/>
+          <a:lstStyle/>
+          <a:p>
+            <a:pPr indent="0" marL="0">
+              <a:buNone/>
+            </a:pPr>
+            <a:r>
+              <a:rPr lang="en-US" sz="3000" b="1" dirty="0">
+                <a:solidFill>
+                  <a:srgbClr val="3730A3"/>
+                </a:solidFill>
+                <a:latin typeface="Arial" pitchFamily="34" charset="0"/>
+                <a:ea typeface="Arial" pitchFamily="34" charset="-122"/>
+                <a:cs typeface="Arial" pitchFamily="34" charset="-120"/>
+              </a:rPr>
+              <a:t>Competition &amp; Differentiation</a:t>
+            </a:r>
+            <a:endParaRPr lang="en-US" sz="3000" dirty="0"/>
+          </a:p>
+        </p:txBody>
+      </p:sp>
+      <p:sp>
+        <p:nvSpPr>
+          <p:cNvPr id="4" name="Shape 2"/>
+          <p:cNvSpPr/>
+          <p:nvPr/>
+        </p:nvSpPr>
+        <p:spPr>
+          <a:xfrm>
+            <a:off x="566928" y="1243584"/>
+            <a:ext cx="2194560" cy="50292"/>
+          </a:xfrm>
+          <a:prstGeom prst="rect">
+            <a:avLst/>
+          </a:prstGeom>
+          <a:solidFill>
+            <a:srgbClr val="3730A3"/>
+          </a:solidFill>
+          <a:ln/>
+        </p:spPr>
+      </p:sp>
+      <p:sp>
+        <p:nvSpPr>
+          <p:cNvPr id="5" name="Text 3"/>
+          <p:cNvSpPr/>
+          <p:nvPr/>
+        </p:nvSpPr>
+        <p:spPr>
+          <a:xfrm>
+            <a:off x="548640" y="1554480"/>
+            <a:ext cx="11091672" cy="1536192"/>
+          </a:xfrm>
+          <a:prstGeom prst="rect">
+            <a:avLst/>
+          </a:prstGeom>
+          <a:noFill/>
+          <a:ln/>
+        </p:spPr>
+        <p:txBody>
           <a:bodyPr wrap="square" rtlCol="0" anchor="t"/>
           <a:lstStyle/>
           <a:p>
-            <a:pPr marL="342900" indent="-342900">
+            <a:pPr marL="228600" indent="-228600">
+              <a:lnSpc>
+                <a:spcPct val="105000"/>
+              </a:lnSpc>
+              <a:spcAft>
+                <a:spcPts val="800"/>
+              </a:spcAft>
               <a:buSzPct val="100000"/>
               <a:buChar char="•"/>
             </a:pPr>
             <a:r>
               <a:rPr lang="en-US" sz="1800" dirty="0">
                 <a:solidFill>
-                  <a:srgbClr val="444444"/>
+                  <a:srgbClr val="1E293B"/>
                 </a:solidFill>
                 <a:latin typeface="Arial" pitchFamily="34" charset="0"/>
                 <a:ea typeface="Arial" pitchFamily="34" charset="-122"/>
@@ -1680,14 +1875,20 @@
             <a:endParaRPr lang="en-US" sz="1800" dirty="0"/>
           </a:p>
           <a:p>
-            <a:pPr marL="342900" indent="-342900">
+            <a:pPr marL="228600" indent="-228600">
+              <a:lnSpc>
+                <a:spcPct val="105000"/>
+              </a:lnSpc>
+              <a:spcAft>
+                <a:spcPts val="800"/>
+              </a:spcAft>
               <a:buSzPct val="100000"/>
               <a:buChar char="•"/>
             </a:pPr>
             <a:r>
               <a:rPr lang="en-US" sz="1800" dirty="0">
                 <a:solidFill>
-                  <a:srgbClr val="444444"/>
+                  <a:srgbClr val="1E293B"/>
                 </a:solidFill>
                 <a:latin typeface="Arial" pitchFamily="34" charset="0"/>
                 <a:ea typeface="Arial" pitchFamily="34" charset="-122"/>
@@ -1698,14 +1899,20 @@
             <a:endParaRPr lang="en-US" sz="1800" dirty="0"/>
           </a:p>
           <a:p>
-            <a:pPr marL="342900" indent="-342900">
+            <a:pPr marL="228600" indent="-228600">
+              <a:lnSpc>
+                <a:spcPct val="105000"/>
+              </a:lnSpc>
+              <a:spcAft>
+                <a:spcPts val="800"/>
+              </a:spcAft>
               <a:buSzPct val="100000"/>
               <a:buChar char="•"/>
             </a:pPr>
             <a:r>
               <a:rPr lang="en-US" sz="1800" dirty="0">
                 <a:solidFill>
-                  <a:srgbClr val="444444"/>
+                  <a:srgbClr val="1E293B"/>
                 </a:solidFill>
                 <a:latin typeface="Arial" pitchFamily="34" charset="0"/>
                 <a:ea typeface="Arial" pitchFamily="34" charset="-122"/>
@@ -1716,14 +1923,20 @@
             <a:endParaRPr lang="en-US" sz="1800" dirty="0"/>
           </a:p>
           <a:p>
-            <a:pPr marL="342900" indent="-342900">
+            <a:pPr marL="228600" indent="-228600">
+              <a:lnSpc>
+                <a:spcPct val="105000"/>
+              </a:lnSpc>
+              <a:spcAft>
+                <a:spcPts val="800"/>
+              </a:spcAft>
               <a:buSzPct val="100000"/>
               <a:buChar char="•"/>
             </a:pPr>
             <a:r>
               <a:rPr lang="en-US" sz="1800" dirty="0">
                 <a:solidFill>
-                  <a:srgbClr val="444444"/>
+                  <a:srgbClr val="1E293B"/>
                 </a:solidFill>
                 <a:latin typeface="Arial" pitchFamily="34" charset="0"/>
                 <a:ea typeface="Arial" pitchFamily="34" charset="-122"/>
@@ -1737,14 +1950,14 @@
       </p:sp>
       <p:sp>
         <p:nvSpPr>
-          <p:cNvPr id="4" name="Text 2"/>
+          <p:cNvPr id="6" name="Text 4"/>
           <p:cNvSpPr/>
           <p:nvPr/>
         </p:nvSpPr>
         <p:spPr>
           <a:xfrm>
-            <a:off x="457200" y="2743200"/>
-            <a:ext cx="11274552" cy="548640"/>
+            <a:off x="548640" y="3200400"/>
+            <a:ext cx="11091672" cy="320040"/>
           </a:xfrm>
           <a:prstGeom prst="rect">
             <a:avLst/>
@@ -1762,7 +1975,7 @@
             <a:r>
               <a:rPr lang="en-US" sz="1800" dirty="0">
                 <a:solidFill>
-                  <a:srgbClr val="444444"/>
+                  <a:srgbClr val="1E293B"/>
                 </a:solidFill>
                 <a:latin typeface="Arial" pitchFamily="34" charset="0"/>
                 <a:ea typeface="Arial" pitchFamily="34" charset="-122"/>
@@ -1776,7 +1989,7 @@
             <a:r>
               <a:rPr lang="en-US" sz="1800" b="1" dirty="0">
                 <a:solidFill>
-                  <a:srgbClr val="444444"/>
+                  <a:srgbClr val="1E293B"/>
                 </a:solidFill>
                 <a:latin typeface="Arial" pitchFamily="34" charset="0"/>
                 <a:ea typeface="Arial" pitchFamily="34" charset="-122"/>
@@ -1790,7 +2003,7 @@
             <a:r>
               <a:rPr lang="en-US" sz="1800" dirty="0">
                 <a:solidFill>
-                  <a:srgbClr val="444444"/>
+                  <a:srgbClr val="1E293B"/>
                 </a:solidFill>
                 <a:latin typeface="Arial" pitchFamily="34" charset="0"/>
                 <a:ea typeface="Arial" pitchFamily="34" charset="-122"/>
@@ -1799,6 +2012,45 @@
               <a:t> — exactly the contested environment that matters.</a:t>
             </a:r>
             <a:endParaRPr lang="en-US" sz="1800" dirty="0"/>
+          </a:p>
+        </p:txBody>
+      </p:sp>
+      <p:sp>
+        <p:nvSpPr>
+          <p:cNvPr id="7" name="Text 5"/>
+          <p:cNvSpPr/>
+          <p:nvPr/>
+        </p:nvSpPr>
+        <p:spPr>
+          <a:xfrm>
+            <a:off x="11274552" y="6446520"/>
+            <a:ext cx="548640" cy="274320"/>
+          </a:xfrm>
+          <a:prstGeom prst="rect">
+            <a:avLst/>
+          </a:prstGeom>
+          <a:noFill/>
+          <a:ln/>
+        </p:spPr>
+        <p:txBody>
+          <a:bodyPr wrap="square" rtlCol="0" anchor="ctr"/>
+          <a:lstStyle/>
+          <a:p>
+            <a:pPr algn="r" indent="0" marL="0">
+              <a:buNone/>
+            </a:pPr>
+            <a:r>
+              <a:rPr lang="en-US" sz="1000" dirty="0">
+                <a:solidFill>
+                  <a:srgbClr val="64748B"/>
+                </a:solidFill>
+                <a:latin typeface="Arial" pitchFamily="34" charset="0"/>
+                <a:ea typeface="Arial" pitchFamily="34" charset="-122"/>
+                <a:cs typeface="Arial" pitchFamily="34" charset="-120"/>
+              </a:rPr>
+              <a:t>3</a:t>
+            </a:r>
+            <a:endParaRPr lang="en-US" sz="1000" dirty="0"/>
           </a:p>
         </p:txBody>
       </p:sp>
@@ -1813,6 +2065,13 @@
 <file path=ppt/slides/slide4.xml><?xml version="1.0" encoding="utf-8"?>
 <p:sld xmlns:a="http://schemas.openxmlformats.org/drawingml/2006/main" xmlns:r="http://schemas.openxmlformats.org/officeDocument/2006/relationships" xmlns:p="http://schemas.openxmlformats.org/presentationml/2006/main">
   <p:cSld name="Slide 4">
+    <p:bg>
+      <p:bgPr>
+        <a:solidFill>
+          <a:srgbClr val="FFFFFF"/>
+        </a:solidFill>
+      </p:bgPr>
+    </p:bg>
     <p:spTree>
       <p:nvGrpSpPr>
         <p:cNvPr id="1" name=""/>
@@ -1829,42 +2088,23 @@
       </p:grpSpPr>
       <p:sp>
         <p:nvSpPr>
-          <p:cNvPr id="2" name="Text 0"/>
+          <p:cNvPr id="2" name="Shape 0"/>
           <p:cNvSpPr/>
           <p:nvPr/>
         </p:nvSpPr>
         <p:spPr>
           <a:xfrm>
-            <a:off x="457200" y="274320"/>
-            <a:ext cx="11274552" cy="914400"/>
-          </a:xfrm>
-          <a:prstGeom prst="rect">
-            <a:avLst/>
-          </a:prstGeom>
-          <a:noFill/>
+            <a:off x="0" y="0"/>
+            <a:ext cx="146304" cy="6858000"/>
+          </a:xfrm>
+          <a:prstGeom prst="rect">
+            <a:avLst/>
+          </a:prstGeom>
+          <a:solidFill>
+            <a:srgbClr val="3730A3"/>
+          </a:solidFill>
           <a:ln/>
         </p:spPr>
-        <p:txBody>
-          <a:bodyPr wrap="square" rtlCol="0" anchor="b"/>
-          <a:lstStyle/>
-          <a:p>
-            <a:pPr indent="0" marL="0">
-              <a:buNone/>
-            </a:pPr>
-            <a:r>
-              <a:rPr lang="en-US" sz="2800" b="1" dirty="0">
-                <a:solidFill>
-                  <a:srgbClr val="333333"/>
-                </a:solidFill>
-                <a:latin typeface="Arial" pitchFamily="34" charset="0"/>
-                <a:ea typeface="Arial" pitchFamily="34" charset="-122"/>
-                <a:cs typeface="Arial" pitchFamily="34" charset="-120"/>
-              </a:rPr>
-              <a:t>Go-to-Market &amp; Milestones</a:t>
-            </a:r>
-            <a:endParaRPr lang="en-US" sz="2800" dirty="0"/>
-          </a:p>
-        </p:txBody>
       </p:sp>
       <p:sp>
         <p:nvSpPr>
@@ -1874,8 +2114,8 @@
         </p:nvSpPr>
         <p:spPr>
           <a:xfrm>
-            <a:off x="457200" y="1371600"/>
-            <a:ext cx="11274552" cy="1280160"/>
+            <a:off x="548640" y="384048"/>
+            <a:ext cx="11091672" cy="822960"/>
           </a:xfrm>
           <a:prstGeom prst="rect">
             <a:avLst/>
@@ -1884,10 +2124,75 @@
           <a:ln/>
         </p:spPr>
         <p:txBody>
+          <a:bodyPr wrap="square" rtlCol="0" anchor="b"/>
+          <a:lstStyle/>
+          <a:p>
+            <a:pPr indent="0" marL="0">
+              <a:buNone/>
+            </a:pPr>
+            <a:r>
+              <a:rPr lang="en-US" sz="3000" b="1" dirty="0">
+                <a:solidFill>
+                  <a:srgbClr val="3730A3"/>
+                </a:solidFill>
+                <a:latin typeface="Arial" pitchFamily="34" charset="0"/>
+                <a:ea typeface="Arial" pitchFamily="34" charset="-122"/>
+                <a:cs typeface="Arial" pitchFamily="34" charset="-120"/>
+              </a:rPr>
+              <a:t>Go-to-Market &amp; Milestones</a:t>
+            </a:r>
+            <a:endParaRPr lang="en-US" sz="3000" dirty="0"/>
+          </a:p>
+        </p:txBody>
+      </p:sp>
+      <p:sp>
+        <p:nvSpPr>
+          <p:cNvPr id="4" name="Shape 2"/>
+          <p:cNvSpPr/>
+          <p:nvPr/>
+        </p:nvSpPr>
+        <p:spPr>
+          <a:xfrm>
+            <a:off x="566928" y="1243584"/>
+            <a:ext cx="2194560" cy="50292"/>
+          </a:xfrm>
+          <a:prstGeom prst="rect">
+            <a:avLst/>
+          </a:prstGeom>
+          <a:solidFill>
+            <a:srgbClr val="3730A3"/>
+          </a:solidFill>
+          <a:ln/>
+        </p:spPr>
+      </p:sp>
+      <p:sp>
+        <p:nvSpPr>
+          <p:cNvPr id="5" name="Text 3"/>
+          <p:cNvSpPr/>
+          <p:nvPr/>
+        </p:nvSpPr>
+        <p:spPr>
+          <a:xfrm>
+            <a:off x="548640" y="1554480"/>
+            <a:ext cx="11091672" cy="1536192"/>
+          </a:xfrm>
+          <a:prstGeom prst="rect">
+            <a:avLst/>
+          </a:prstGeom>
+          <a:noFill/>
+          <a:ln/>
+        </p:spPr>
+        <p:txBody>
           <a:bodyPr wrap="square" rtlCol="0" anchor="t"/>
           <a:lstStyle/>
           <a:p>
-            <a:pPr marL="342900" indent="-342900">
+            <a:pPr marL="228600" indent="-228600">
+              <a:lnSpc>
+                <a:spcPct val="105000"/>
+              </a:lnSpc>
+              <a:spcAft>
+                <a:spcPts val="800"/>
+              </a:spcAft>
               <a:buSzPct val="100000"/>
               <a:buFont typeface="+mj-lt"/>
               <a:buAutoNum type="arabicPeriod" startAt="1"/>
@@ -1895,7 +2200,7 @@
             <a:r>
               <a:rPr lang="en-US" sz="1800" dirty="0">
                 <a:solidFill>
-                  <a:srgbClr val="444444"/>
+                  <a:srgbClr val="1E293B"/>
                 </a:solidFill>
                 <a:latin typeface="Arial" pitchFamily="34" charset="0"/>
                 <a:ea typeface="Arial" pitchFamily="34" charset="-122"/>
@@ -1906,7 +2211,13 @@
             <a:endParaRPr lang="en-US" sz="1800" dirty="0"/>
           </a:p>
           <a:p>
-            <a:pPr marL="342900" indent="-342900">
+            <a:pPr marL="228600" indent="-228600">
+              <a:lnSpc>
+                <a:spcPct val="105000"/>
+              </a:lnSpc>
+              <a:spcAft>
+                <a:spcPts val="800"/>
+              </a:spcAft>
               <a:buSzPct val="100000"/>
               <a:buFont typeface="+mj-lt"/>
               <a:buAutoNum type="arabicPeriod" startAt="1"/>
@@ -1914,7 +2225,7 @@
             <a:r>
               <a:rPr lang="en-US" sz="1800" dirty="0">
                 <a:solidFill>
-                  <a:srgbClr val="444444"/>
+                  <a:srgbClr val="1E293B"/>
                 </a:solidFill>
                 <a:latin typeface="Arial" pitchFamily="34" charset="0"/>
                 <a:ea typeface="Arial" pitchFamily="34" charset="-122"/>
@@ -1925,7 +2236,13 @@
             <a:endParaRPr lang="en-US" sz="1800" dirty="0"/>
           </a:p>
           <a:p>
-            <a:pPr marL="342900" indent="-342900">
+            <a:pPr marL="228600" indent="-228600">
+              <a:lnSpc>
+                <a:spcPct val="105000"/>
+              </a:lnSpc>
+              <a:spcAft>
+                <a:spcPts val="800"/>
+              </a:spcAft>
               <a:buSzPct val="100000"/>
               <a:buFont typeface="+mj-lt"/>
               <a:buAutoNum type="arabicPeriod" startAt="1"/>
@@ -1933,7 +2250,7 @@
             <a:r>
               <a:rPr lang="en-US" sz="1800" dirty="0">
                 <a:solidFill>
-                  <a:srgbClr val="444444"/>
+                  <a:srgbClr val="1E293B"/>
                 </a:solidFill>
                 <a:latin typeface="Arial" pitchFamily="34" charset="0"/>
                 <a:ea typeface="Arial" pitchFamily="34" charset="-122"/>
@@ -1944,7 +2261,13 @@
             <a:endParaRPr lang="en-US" sz="1800" dirty="0"/>
           </a:p>
           <a:p>
-            <a:pPr marL="342900" indent="-342900">
+            <a:pPr marL="228600" indent="-228600">
+              <a:lnSpc>
+                <a:spcPct val="105000"/>
+              </a:lnSpc>
+              <a:spcAft>
+                <a:spcPts val="800"/>
+              </a:spcAft>
               <a:buSzPct val="100000"/>
               <a:buFont typeface="+mj-lt"/>
               <a:buAutoNum type="arabicPeriod" startAt="1"/>
@@ -1952,7 +2275,7 @@
             <a:r>
               <a:rPr lang="en-US" sz="1800" dirty="0">
                 <a:solidFill>
-                  <a:srgbClr val="444444"/>
+                  <a:srgbClr val="1E293B"/>
                 </a:solidFill>
                 <a:latin typeface="Arial" pitchFamily="34" charset="0"/>
                 <a:ea typeface="Arial" pitchFamily="34" charset="-122"/>
@@ -1966,14 +2289,14 @@
       </p:sp>
       <p:sp>
         <p:nvSpPr>
-          <p:cNvPr id="4" name="Text 2"/>
+          <p:cNvPr id="6" name="Text 4"/>
           <p:cNvSpPr/>
           <p:nvPr/>
         </p:nvSpPr>
         <p:spPr>
           <a:xfrm>
-            <a:off x="457200" y="2743200"/>
-            <a:ext cx="11274552" cy="548640"/>
+            <a:off x="548640" y="3200400"/>
+            <a:ext cx="11091672" cy="512064"/>
           </a:xfrm>
           <a:prstGeom prst="rect">
             <a:avLst/>
@@ -1991,7 +2314,7 @@
             <a:r>
               <a:rPr lang="en-US" sz="1800" dirty="0">
                 <a:solidFill>
-                  <a:srgbClr val="444444"/>
+                  <a:srgbClr val="1E293B"/>
                 </a:solidFill>
                 <a:latin typeface="Arial" pitchFamily="34" charset="0"/>
                 <a:ea typeface="Arial" pitchFamily="34" charset="-122"/>
@@ -2000,6 +2323,45 @@
               <a:t>Transition is a software integration, not a hardware program — a low-barrier path to a funded home.</a:t>
             </a:r>
             <a:endParaRPr lang="en-US" sz="1800" dirty="0"/>
+          </a:p>
+        </p:txBody>
+      </p:sp>
+      <p:sp>
+        <p:nvSpPr>
+          <p:cNvPr id="7" name="Text 5"/>
+          <p:cNvSpPr/>
+          <p:nvPr/>
+        </p:nvSpPr>
+        <p:spPr>
+          <a:xfrm>
+            <a:off x="11274552" y="6446520"/>
+            <a:ext cx="548640" cy="274320"/>
+          </a:xfrm>
+          <a:prstGeom prst="rect">
+            <a:avLst/>
+          </a:prstGeom>
+          <a:noFill/>
+          <a:ln/>
+        </p:spPr>
+        <p:txBody>
+          <a:bodyPr wrap="square" rtlCol="0" anchor="ctr"/>
+          <a:lstStyle/>
+          <a:p>
+            <a:pPr algn="r" indent="0" marL="0">
+              <a:buNone/>
+            </a:pPr>
+            <a:r>
+              <a:rPr lang="en-US" sz="1000" dirty="0">
+                <a:solidFill>
+                  <a:srgbClr val="64748B"/>
+                </a:solidFill>
+                <a:latin typeface="Arial" pitchFamily="34" charset="0"/>
+                <a:ea typeface="Arial" pitchFamily="34" charset="-122"/>
+                <a:cs typeface="Arial" pitchFamily="34" charset="-120"/>
+              </a:rPr>
+              <a:t>4</a:t>
+            </a:r>
+            <a:endParaRPr lang="en-US" sz="1000" dirty="0"/>
           </a:p>
         </p:txBody>
       </p:sp>
@@ -2014,6 +2376,13 @@
 <file path=ppt/slides/slide5.xml><?xml version="1.0" encoding="utf-8"?>
 <p:sld xmlns:a="http://schemas.openxmlformats.org/drawingml/2006/main" xmlns:r="http://schemas.openxmlformats.org/officeDocument/2006/relationships" xmlns:p="http://schemas.openxmlformats.org/presentationml/2006/main">
   <p:cSld name="Slide 5">
+    <p:bg>
+      <p:bgPr>
+        <a:solidFill>
+          <a:srgbClr val="FFFFFF"/>
+        </a:solidFill>
+      </p:bgPr>
+    </p:bg>
     <p:spTree>
       <p:nvGrpSpPr>
         <p:cNvPr id="1" name=""/>
@@ -2030,42 +2399,23 @@
       </p:grpSpPr>
       <p:sp>
         <p:nvSpPr>
-          <p:cNvPr id="2" name="Text 0"/>
+          <p:cNvPr id="2" name="Shape 0"/>
           <p:cNvSpPr/>
           <p:nvPr/>
         </p:nvSpPr>
         <p:spPr>
           <a:xfrm>
-            <a:off x="457200" y="274320"/>
-            <a:ext cx="11274552" cy="914400"/>
-          </a:xfrm>
-          <a:prstGeom prst="rect">
-            <a:avLst/>
-          </a:prstGeom>
-          <a:noFill/>
+            <a:off x="0" y="0"/>
+            <a:ext cx="146304" cy="6858000"/>
+          </a:xfrm>
+          <a:prstGeom prst="rect">
+            <a:avLst/>
+          </a:prstGeom>
+          <a:solidFill>
+            <a:srgbClr val="3730A3"/>
+          </a:solidFill>
           <a:ln/>
         </p:spPr>
-        <p:txBody>
-          <a:bodyPr wrap="square" rtlCol="0" anchor="b"/>
-          <a:lstStyle/>
-          <a:p>
-            <a:pPr indent="0" marL="0">
-              <a:buNone/>
-            </a:pPr>
-            <a:r>
-              <a:rPr lang="en-US" sz="2800" b="1" dirty="0">
-                <a:solidFill>
-                  <a:srgbClr val="333333"/>
-                </a:solidFill>
-                <a:latin typeface="Arial" pitchFamily="34" charset="0"/>
-                <a:ea typeface="Arial" pitchFamily="34" charset="-122"/>
-                <a:cs typeface="Arial" pitchFamily="34" charset="-120"/>
-              </a:rPr>
-              <a:t>Financials &amp; The Ask</a:t>
-            </a:r>
-            <a:endParaRPr lang="en-US" sz="2800" dirty="0"/>
-          </a:p>
-        </p:txBody>
       </p:sp>
       <p:sp>
         <p:nvSpPr>
@@ -2075,8 +2425,8 @@
         </p:nvSpPr>
         <p:spPr>
           <a:xfrm>
-            <a:off x="457200" y="1371600"/>
-            <a:ext cx="11274552" cy="365760"/>
+            <a:off x="548640" y="384048"/>
+            <a:ext cx="11091672" cy="822960"/>
           </a:xfrm>
           <a:prstGeom prst="rect">
             <a:avLst/>
@@ -2085,148 +2435,46 @@
           <a:ln/>
         </p:spPr>
         <p:txBody>
-          <a:bodyPr wrap="square" rtlCol="0" anchor="t"/>
+          <a:bodyPr wrap="square" rtlCol="0" anchor="b"/>
           <a:lstStyle/>
           <a:p>
             <a:pPr indent="0" marL="0">
               <a:buNone/>
             </a:pPr>
             <a:r>
-              <a:rPr lang="en-US" sz="1800" dirty="0">
-                <a:solidFill>
-                  <a:srgbClr val="444444"/>
-                </a:solidFill>
-                <a:latin typeface="Arial" pitchFamily="34" charset="0"/>
-                <a:ea typeface="Arial" pitchFamily="34" charset="-122"/>
-                <a:cs typeface="Arial" pitchFamily="34" charset="-120"/>
-              </a:rPr>
-              <a:t>Phase I budget: </a:t>
-            </a:r>
-            <a:pPr indent="0" marL="0">
-              <a:buNone/>
-            </a:pPr>
-            <a:r>
-              <a:rPr lang="en-US" sz="1800" b="1" dirty="0">
-                <a:solidFill>
-                  <a:srgbClr val="444444"/>
-                </a:solidFill>
-                <a:latin typeface="Arial" pitchFamily="34" charset="0"/>
-                <a:ea typeface="Arial" pitchFamily="34" charset="-122"/>
-                <a:cs typeface="Arial" pitchFamily="34" charset="-120"/>
-              </a:rPr>
-              <a:t>$150,000</a:t>
-            </a:r>
-            <a:pPr indent="0" marL="0">
-              <a:buNone/>
-            </a:pPr>
-            <a:r>
-              <a:rPr lang="en-US" sz="1800" dirty="0">
-                <a:solidFill>
-                  <a:srgbClr val="444444"/>
-                </a:solidFill>
-                <a:latin typeface="Arial" pitchFamily="34" charset="0"/>
-                <a:ea typeface="Arial" pitchFamily="34" charset="-122"/>
-                <a:cs typeface="Arial" pitchFamily="34" charset="-120"/>
-              </a:rPr>
-              <a:t> over 6 months.</a:t>
-            </a:r>
-            <a:endParaRPr lang="en-US" sz="1800" dirty="0"/>
-          </a:p>
-        </p:txBody>
-      </p:sp>
-      <p:sp>
-        <p:nvSpPr>
-          <p:cNvPr id="4" name="Text 2"/>
+              <a:rPr lang="en-US" sz="3000" b="1" dirty="0">
+                <a:solidFill>
+                  <a:srgbClr val="3730A3"/>
+                </a:solidFill>
+                <a:latin typeface="Arial" pitchFamily="34" charset="0"/>
+                <a:ea typeface="Arial" pitchFamily="34" charset="-122"/>
+                <a:cs typeface="Arial" pitchFamily="34" charset="-120"/>
+              </a:rPr>
+              <a:t>Financials &amp; The Ask</a:t>
+            </a:r>
+            <a:endParaRPr lang="en-US" sz="3000" dirty="0"/>
+          </a:p>
+        </p:txBody>
+      </p:sp>
+      <p:sp>
+        <p:nvSpPr>
+          <p:cNvPr id="4" name="Shape 2"/>
           <p:cNvSpPr/>
           <p:nvPr/>
         </p:nvSpPr>
         <p:spPr>
           <a:xfrm>
-            <a:off x="457200" y="1828800"/>
-            <a:ext cx="11274552" cy="1280160"/>
-          </a:xfrm>
-          <a:prstGeom prst="rect">
-            <a:avLst/>
-          </a:prstGeom>
-          <a:noFill/>
+            <a:off x="566928" y="1243584"/>
+            <a:ext cx="2194560" cy="50292"/>
+          </a:xfrm>
+          <a:prstGeom prst="rect">
+            <a:avLst/>
+          </a:prstGeom>
+          <a:solidFill>
+            <a:srgbClr val="3730A3"/>
+          </a:solidFill>
           <a:ln/>
         </p:spPr>
-        <p:txBody>
-          <a:bodyPr wrap="square" rtlCol="0" anchor="t"/>
-          <a:lstStyle/>
-          <a:p>
-            <a:pPr marL="342900" indent="-342900">
-              <a:buSzPct val="100000"/>
-              <a:buChar char="•"/>
-            </a:pPr>
-            <a:r>
-              <a:rPr lang="en-US" sz="1800" dirty="0">
-                <a:solidFill>
-                  <a:srgbClr val="444444"/>
-                </a:solidFill>
-                <a:latin typeface="Arial" pitchFamily="34" charset="0"/>
-                <a:ea typeface="Arial" pitchFamily="34" charset="-122"/>
-                <a:cs typeface="Arial" pitchFamily="34" charset="-120"/>
-              </a:rPr>
-              <a:t>Team of 3 (PI + systems + ML engineer)</a:t>
-            </a:r>
-            <a:endParaRPr lang="en-US" sz="1800" dirty="0"/>
-          </a:p>
-          <a:p>
-            <a:pPr marL="342900" indent="-342900">
-              <a:buSzPct val="100000"/>
-              <a:buChar char="•"/>
-            </a:pPr>
-            <a:r>
-              <a:rPr lang="en-US" sz="1800" dirty="0">
-                <a:solidFill>
-                  <a:srgbClr val="444444"/>
-                </a:solidFill>
-                <a:latin typeface="Arial" pitchFamily="34" charset="0"/>
-                <a:ea typeface="Arial" pitchFamily="34" charset="-122"/>
-                <a:cs typeface="Arial" pitchFamily="34" charset="-120"/>
-              </a:rPr>
-              <a:t>Deliverable: validated 4-bit edge classifier meeting all three gates</a:t>
-            </a:r>
-            <a:endParaRPr lang="en-US" sz="1800" dirty="0"/>
-          </a:p>
-          <a:p>
-            <a:pPr marL="342900" indent="-342900">
-              <a:buSzPct val="100000"/>
-              <a:buChar char="•"/>
-            </a:pPr>
-            <a:r>
-              <a:rPr lang="en-US" sz="1800" dirty="0">
-                <a:solidFill>
-                  <a:srgbClr val="444444"/>
-                </a:solidFill>
-                <a:latin typeface="Arial" pitchFamily="34" charset="0"/>
-                <a:ea typeface="Arial" pitchFamily="34" charset="-122"/>
-                <a:cs typeface="Arial" pitchFamily="34" charset="-120"/>
-              </a:rPr>
-              <a:t>Phase II target: $1.1M for an at-sea demonstration</a:t>
-            </a:r>
-            <a:endParaRPr lang="en-US" sz="1800" dirty="0"/>
-          </a:p>
-          <a:p>
-            <a:pPr marL="342900" indent="-342900">
-              <a:buSzPct val="100000"/>
-              <a:buChar char="•"/>
-            </a:pPr>
-            <a:r>
-              <a:rPr lang="en-US" sz="1800" dirty="0">
-                <a:solidFill>
-                  <a:srgbClr val="444444"/>
-                </a:solidFill>
-                <a:latin typeface="Arial" pitchFamily="34" charset="0"/>
-                <a:ea typeface="Arial" pitchFamily="34" charset="-122"/>
-                <a:cs typeface="Arial" pitchFamily="34" charset="-120"/>
-              </a:rPr>
-              <a:t>Commercial revenue path reduces single-program reliance</a:t>
-            </a:r>
-            <a:endParaRPr lang="en-US" sz="1800" dirty="0"/>
-          </a:p>
-        </p:txBody>
       </p:sp>
       <p:sp>
         <p:nvSpPr>
@@ -2236,8 +2484,8 @@
         </p:nvSpPr>
         <p:spPr>
           <a:xfrm>
-            <a:off x="457200" y="3200400"/>
-            <a:ext cx="11274552" cy="365760"/>
+            <a:off x="548640" y="1554480"/>
+            <a:ext cx="11091672" cy="320040"/>
           </a:xfrm>
           <a:prstGeom prst="rect">
             <a:avLst/>
@@ -2255,7 +2503,192 @@
             <a:r>
               <a:rPr lang="en-US" sz="1800" dirty="0">
                 <a:solidFill>
-                  <a:srgbClr val="444444"/>
+                  <a:srgbClr val="1E293B"/>
+                </a:solidFill>
+                <a:latin typeface="Arial" pitchFamily="34" charset="0"/>
+                <a:ea typeface="Arial" pitchFamily="34" charset="-122"/>
+                <a:cs typeface="Arial" pitchFamily="34" charset="-120"/>
+              </a:rPr>
+              <a:t>Phase I budget: </a:t>
+            </a:r>
+            <a:pPr indent="0" marL="0">
+              <a:buNone/>
+            </a:pPr>
+            <a:r>
+              <a:rPr lang="en-US" sz="1800" b="1" dirty="0">
+                <a:solidFill>
+                  <a:srgbClr val="1E293B"/>
+                </a:solidFill>
+                <a:latin typeface="Arial" pitchFamily="34" charset="0"/>
+                <a:ea typeface="Arial" pitchFamily="34" charset="-122"/>
+                <a:cs typeface="Arial" pitchFamily="34" charset="-120"/>
+              </a:rPr>
+              <a:t>$150,000</a:t>
+            </a:r>
+            <a:pPr indent="0" marL="0">
+              <a:buNone/>
+            </a:pPr>
+            <a:r>
+              <a:rPr lang="en-US" sz="1800" dirty="0">
+                <a:solidFill>
+                  <a:srgbClr val="1E293B"/>
+                </a:solidFill>
+                <a:latin typeface="Arial" pitchFamily="34" charset="0"/>
+                <a:ea typeface="Arial" pitchFamily="34" charset="-122"/>
+                <a:cs typeface="Arial" pitchFamily="34" charset="-120"/>
+              </a:rPr>
+              <a:t> over 6 months.</a:t>
+            </a:r>
+            <a:endParaRPr lang="en-US" sz="1800" dirty="0"/>
+          </a:p>
+        </p:txBody>
+      </p:sp>
+      <p:sp>
+        <p:nvSpPr>
+          <p:cNvPr id="6" name="Text 4"/>
+          <p:cNvSpPr/>
+          <p:nvPr/>
+        </p:nvSpPr>
+        <p:spPr>
+          <a:xfrm>
+            <a:off x="548640" y="1984248"/>
+            <a:ext cx="11091672" cy="1536192"/>
+          </a:xfrm>
+          <a:prstGeom prst="rect">
+            <a:avLst/>
+          </a:prstGeom>
+          <a:noFill/>
+          <a:ln/>
+        </p:spPr>
+        <p:txBody>
+          <a:bodyPr wrap="square" rtlCol="0" anchor="t"/>
+          <a:lstStyle/>
+          <a:p>
+            <a:pPr marL="228600" indent="-228600">
+              <a:lnSpc>
+                <a:spcPct val="105000"/>
+              </a:lnSpc>
+              <a:spcAft>
+                <a:spcPts val="800"/>
+              </a:spcAft>
+              <a:buSzPct val="100000"/>
+              <a:buChar char="•"/>
+            </a:pPr>
+            <a:r>
+              <a:rPr lang="en-US" sz="1800" dirty="0">
+                <a:solidFill>
+                  <a:srgbClr val="1E293B"/>
+                </a:solidFill>
+                <a:latin typeface="Arial" pitchFamily="34" charset="0"/>
+                <a:ea typeface="Arial" pitchFamily="34" charset="-122"/>
+                <a:cs typeface="Arial" pitchFamily="34" charset="-120"/>
+              </a:rPr>
+              <a:t>Team of 3 (PI + systems + ML engineer)</a:t>
+            </a:r>
+            <a:endParaRPr lang="en-US" sz="1800" dirty="0"/>
+          </a:p>
+          <a:p>
+            <a:pPr marL="228600" indent="-228600">
+              <a:lnSpc>
+                <a:spcPct val="105000"/>
+              </a:lnSpc>
+              <a:spcAft>
+                <a:spcPts val="800"/>
+              </a:spcAft>
+              <a:buSzPct val="100000"/>
+              <a:buChar char="•"/>
+            </a:pPr>
+            <a:r>
+              <a:rPr lang="en-US" sz="1800" dirty="0">
+                <a:solidFill>
+                  <a:srgbClr val="1E293B"/>
+                </a:solidFill>
+                <a:latin typeface="Arial" pitchFamily="34" charset="0"/>
+                <a:ea typeface="Arial" pitchFamily="34" charset="-122"/>
+                <a:cs typeface="Arial" pitchFamily="34" charset="-120"/>
+              </a:rPr>
+              <a:t>Deliverable: validated 4-bit edge classifier meeting all three gates</a:t>
+            </a:r>
+            <a:endParaRPr lang="en-US" sz="1800" dirty="0"/>
+          </a:p>
+          <a:p>
+            <a:pPr marL="228600" indent="-228600">
+              <a:lnSpc>
+                <a:spcPct val="105000"/>
+              </a:lnSpc>
+              <a:spcAft>
+                <a:spcPts val="800"/>
+              </a:spcAft>
+              <a:buSzPct val="100000"/>
+              <a:buChar char="•"/>
+            </a:pPr>
+            <a:r>
+              <a:rPr lang="en-US" sz="1800" dirty="0">
+                <a:solidFill>
+                  <a:srgbClr val="1E293B"/>
+                </a:solidFill>
+                <a:latin typeface="Arial" pitchFamily="34" charset="0"/>
+                <a:ea typeface="Arial" pitchFamily="34" charset="-122"/>
+                <a:cs typeface="Arial" pitchFamily="34" charset="-120"/>
+              </a:rPr>
+              <a:t>Phase II target: $1.1M for an at-sea demonstration</a:t>
+            </a:r>
+            <a:endParaRPr lang="en-US" sz="1800" dirty="0"/>
+          </a:p>
+          <a:p>
+            <a:pPr marL="228600" indent="-228600">
+              <a:lnSpc>
+                <a:spcPct val="105000"/>
+              </a:lnSpc>
+              <a:spcAft>
+                <a:spcPts val="800"/>
+              </a:spcAft>
+              <a:buSzPct val="100000"/>
+              <a:buChar char="•"/>
+            </a:pPr>
+            <a:r>
+              <a:rPr lang="en-US" sz="1800" dirty="0">
+                <a:solidFill>
+                  <a:srgbClr val="1E293B"/>
+                </a:solidFill>
+                <a:latin typeface="Arial" pitchFamily="34" charset="0"/>
+                <a:ea typeface="Arial" pitchFamily="34" charset="-122"/>
+                <a:cs typeface="Arial" pitchFamily="34" charset="-120"/>
+              </a:rPr>
+              <a:t>Commercial revenue path reduces single-program reliance</a:t>
+            </a:r>
+            <a:endParaRPr lang="en-US" sz="1800" dirty="0"/>
+          </a:p>
+        </p:txBody>
+      </p:sp>
+      <p:sp>
+        <p:nvSpPr>
+          <p:cNvPr id="7" name="Text 5"/>
+          <p:cNvSpPr/>
+          <p:nvPr/>
+        </p:nvSpPr>
+        <p:spPr>
+          <a:xfrm>
+            <a:off x="548640" y="3630168"/>
+            <a:ext cx="11091672" cy="320040"/>
+          </a:xfrm>
+          <a:prstGeom prst="rect">
+            <a:avLst/>
+          </a:prstGeom>
+          <a:noFill/>
+          <a:ln/>
+        </p:spPr>
+        <p:txBody>
+          <a:bodyPr wrap="square" rtlCol="0" anchor="t"/>
+          <a:lstStyle/>
+          <a:p>
+            <a:pPr indent="0" marL="0">
+              <a:buNone/>
+            </a:pPr>
+            <a:r>
+              <a:rPr lang="en-US" sz="1800" dirty="0">
+                <a:solidFill>
+                  <a:srgbClr val="3730A3"/>
                 </a:solidFill>
                 <a:latin typeface="Arial" pitchFamily="34" charset="0"/>
                 <a:ea typeface="Arial" pitchFamily="34" charset="-122"/>
@@ -2264,6 +2697,45 @@
               <a:t>Ask: fund Phase I to de-risk the edge classifier and unlock the transition path.</a:t>
             </a:r>
             <a:endParaRPr lang="en-US" sz="1800" dirty="0"/>
+          </a:p>
+        </p:txBody>
+      </p:sp>
+      <p:sp>
+        <p:nvSpPr>
+          <p:cNvPr id="8" name="Text 6"/>
+          <p:cNvSpPr/>
+          <p:nvPr/>
+        </p:nvSpPr>
+        <p:spPr>
+          <a:xfrm>
+            <a:off x="11274552" y="6446520"/>
+            <a:ext cx="548640" cy="274320"/>
+          </a:xfrm>
+          <a:prstGeom prst="rect">
+            <a:avLst/>
+          </a:prstGeom>
+          <a:noFill/>
+          <a:ln/>
+        </p:spPr>
+        <p:txBody>
+          <a:bodyPr wrap="square" rtlCol="0" anchor="ctr"/>
+          <a:lstStyle/>
+          <a:p>
+            <a:pPr algn="r" indent="0" marL="0">
+              <a:buNone/>
+            </a:pPr>
+            <a:r>
+              <a:rPr lang="en-US" sz="1000" dirty="0">
+                <a:solidFill>
+                  <a:srgbClr val="64748B"/>
+                </a:solidFill>
+                <a:latin typeface="Arial" pitchFamily="34" charset="0"/>
+                <a:ea typeface="Arial" pitchFamily="34" charset="-122"/>
+                <a:cs typeface="Arial" pitchFamily="34" charset="-120"/>
+              </a:rPr>
+              <a:t>5</a:t>
+            </a:r>
+            <a:endParaRPr lang="en-US" sz="1000" dirty="0"/>
           </a:p>
         </p:txBody>
       </p:sp>
